--- a/Publicador Lista Padrón Inicial.pptx
+++ b/Publicador Lista Padrón Inicial.pptx
@@ -4228,8 +4228,8 @@
         </p:blipFill>
         <p:spPr>
           <a:xfrm>
-            <a:off x="81944" y="0"/>
-            <a:ext cx="12028110" cy="6858000"/>
+            <a:off x="0" y="0"/>
+            <a:ext cx="12192000" cy="6858000"/>
           </a:xfrm>
           <a:prstGeom prst="rect">
             <a:avLst/>
@@ -4281,15 +4281,20 @@
           <p:nvPr/>
         </p:nvPicPr>
         <p:blipFill>
-          <a:blip r:embed="rId2"/>
-          <a:stretch>
-            <a:fillRect/>
-          </a:stretch>
+          <a:blip r:embed="rId2">
+            <a:extLst>
+              <a:ext uri="{28A0092B-C50C-407E-A947-70E740481C1C}">
+                <a14:useLocalDpi xmlns:a14="http://schemas.microsoft.com/office/drawing/2010/main" val="0"/>
+              </a:ext>
+            </a:extLst>
+          </a:blip>
+          <a:srcRect/>
+          <a:stretch/>
         </p:blipFill>
         <p:spPr>
           <a:xfrm>
-            <a:off x="106161" y="30185"/>
-            <a:ext cx="11979678" cy="6797629"/>
+            <a:off x="0" y="30185"/>
+            <a:ext cx="12192000" cy="6797629"/>
           </a:xfrm>
           <a:prstGeom prst="rect">
             <a:avLst/>
